--- a/classes/parte-1-machine-learning-clasico/095-clustering-k-means-seleccion-de-k-mini-batch/clase-095-clustering-k-means-seleccion-de-k-mini-batch-presentacion.pptx
+++ b/classes/parte-1-machine-learning-clasico/095-clustering-k-means-seleccion-de-k-mini-batch/clase-095-clustering-k-means-seleccion-de-k-mini-batch-presentacion.pptx
@@ -4845,7 +4845,7 @@
                 </a:solidFill>
                 <a:latin typeface="Segoe UI"/>
               </a:rPr>
-              <a:t>Primer bloque ejecutable del notebook.</a:t>
+              <a:t>make_blobs con 5 centros; ajustamos KMeans con n_init y random_state fijos.</a:t>
             </a:r>
           </a:p>
         </p:txBody>
@@ -4932,7 +4932,311 @@
                 </a:solidFill>
                 <a:latin typeface="Courier New"/>
               </a:rPr>
-              <a:t># Imports y configuración inicial</a:t>
+              <a:t>import numpy as np</a:t>
+            </a:r>
+          </a:p>
+          <a:p>
+            <a:pPr>
+              <a:defRPr sz="1200" b="0">
+                <a:solidFill>
+                  <a:srgbClr val="F8FAFC"/>
+                </a:solidFill>
+                <a:latin typeface="Courier New"/>
+              </a:defRPr>
+            </a:pPr>
+            <a:r>
+              <a:rPr sz="1200" b="0">
+                <a:solidFill>
+                  <a:srgbClr val="F8FAFC"/>
+                </a:solidFill>
+                <a:latin typeface="Courier New"/>
+              </a:rPr>
+              <a:t>import matplotlib.pyplot as plt</a:t>
+            </a:r>
+          </a:p>
+          <a:p>
+            <a:pPr>
+              <a:defRPr sz="1200" b="0">
+                <a:solidFill>
+                  <a:srgbClr val="F8FAFC"/>
+                </a:solidFill>
+                <a:latin typeface="Courier New"/>
+              </a:defRPr>
+            </a:pPr>
+            <a:r>
+              <a:rPr sz="1200" b="0">
+                <a:solidFill>
+                  <a:srgbClr val="F8FAFC"/>
+                </a:solidFill>
+                <a:latin typeface="Courier New"/>
+              </a:rPr>
+              <a:t>from sklearn.datasets import make_blobs</a:t>
+            </a:r>
+          </a:p>
+          <a:p>
+            <a:pPr>
+              <a:defRPr sz="1200" b="0">
+                <a:solidFill>
+                  <a:srgbClr val="F8FAFC"/>
+                </a:solidFill>
+                <a:latin typeface="Courier New"/>
+              </a:defRPr>
+            </a:pPr>
+            <a:r>
+              <a:rPr sz="1200" b="0">
+                <a:solidFill>
+                  <a:srgbClr val="F8FAFC"/>
+                </a:solidFill>
+                <a:latin typeface="Courier New"/>
+              </a:rPr>
+              <a:t>from sklearn.cluster import KMeans</a:t>
+            </a:r>
+          </a:p>
+          <a:p>
+            <a:pPr>
+              <a:defRPr sz="1200" b="0">
+                <a:solidFill>
+                  <a:srgbClr val="F8FAFC"/>
+                </a:solidFill>
+                <a:latin typeface="Courier New"/>
+              </a:defRPr>
+            </a:pPr>
+            <a:r>
+              <a:rPr sz="1200" b="0">
+                <a:solidFill>
+                  <a:srgbClr val="F8FAFC"/>
+                </a:solidFill>
+                <a:latin typeface="Courier New"/>
+              </a:rPr>
+              <a:t> </a:t>
+            </a:r>
+          </a:p>
+          <a:p>
+            <a:pPr>
+              <a:defRPr sz="1200" b="0">
+                <a:solidFill>
+                  <a:srgbClr val="F8FAFC"/>
+                </a:solidFill>
+                <a:latin typeface="Courier New"/>
+              </a:defRPr>
+            </a:pPr>
+            <a:r>
+              <a:rPr sz="1200" b="0">
+                <a:solidFill>
+                  <a:srgbClr val="F8FAFC"/>
+                </a:solidFill>
+                <a:latin typeface="Courier New"/>
+              </a:rPr>
+              <a:t>np.random.seed(42)</a:t>
+            </a:r>
+          </a:p>
+          <a:p>
+            <a:pPr>
+              <a:defRPr sz="1200" b="0">
+                <a:solidFill>
+                  <a:srgbClr val="F8FAFC"/>
+                </a:solidFill>
+                <a:latin typeface="Courier New"/>
+              </a:defRPr>
+            </a:pPr>
+            <a:r>
+              <a:rPr sz="1200" b="0">
+                <a:solidFill>
+                  <a:srgbClr val="F8FAFC"/>
+                </a:solidFill>
+                <a:latin typeface="Courier New"/>
+              </a:rPr>
+              <a:t>X, y_true = make_blobs(n_samples=2000, centers=5, cluster_std=0.5, random_state=42)</a:t>
+            </a:r>
+          </a:p>
+          <a:p>
+            <a:pPr>
+              <a:defRPr sz="1200" b="0">
+                <a:solidFill>
+                  <a:srgbClr val="F8FAFC"/>
+                </a:solidFill>
+                <a:latin typeface="Courier New"/>
+              </a:defRPr>
+            </a:pPr>
+            <a:r>
+              <a:rPr sz="1200" b="0">
+                <a:solidFill>
+                  <a:srgbClr val="F8FAFC"/>
+                </a:solidFill>
+                <a:latin typeface="Courier New"/>
+              </a:rPr>
+              <a:t> </a:t>
+            </a:r>
+          </a:p>
+          <a:p>
+            <a:pPr>
+              <a:defRPr sz="1200" b="0">
+                <a:solidFill>
+                  <a:srgbClr val="F8FAFC"/>
+                </a:solidFill>
+                <a:latin typeface="Courier New"/>
+              </a:defRPr>
+            </a:pPr>
+            <a:r>
+              <a:rPr sz="1200" b="0">
+                <a:solidFill>
+                  <a:srgbClr val="F8FAFC"/>
+                </a:solidFill>
+                <a:latin typeface="Courier New"/>
+              </a:rPr>
+              <a:t>km = KMeans(n_clusters=5, n_init=10, random_state=42).fit(X)</a:t>
+            </a:r>
+          </a:p>
+          <a:p>
+            <a:pPr>
+              <a:defRPr sz="1200" b="0">
+                <a:solidFill>
+                  <a:srgbClr val="F8FAFC"/>
+                </a:solidFill>
+                <a:latin typeface="Courier New"/>
+              </a:defRPr>
+            </a:pPr>
+            <a:r>
+              <a:rPr sz="1200" b="0">
+                <a:solidFill>
+                  <a:srgbClr val="F8FAFC"/>
+                </a:solidFill>
+                <a:latin typeface="Courier New"/>
+              </a:rPr>
+              <a:t>print("inercia:", round(km.inertia_, 2), "| centroides:", km.cluster_centers_.shape)</a:t>
+            </a:r>
+          </a:p>
+          <a:p>
+            <a:pPr>
+              <a:defRPr sz="1200" b="0">
+                <a:solidFill>
+                  <a:srgbClr val="F8FAFC"/>
+                </a:solidFill>
+                <a:latin typeface="Courier New"/>
+              </a:defRPr>
+            </a:pPr>
+            <a:r>
+              <a:rPr sz="1200" b="0">
+                <a:solidFill>
+                  <a:srgbClr val="F8FAFC"/>
+                </a:solidFill>
+                <a:latin typeface="Courier New"/>
+              </a:rPr>
+              <a:t> </a:t>
+            </a:r>
+          </a:p>
+          <a:p>
+            <a:pPr>
+              <a:defRPr sz="1200" b="0">
+                <a:solidFill>
+                  <a:srgbClr val="F8FAFC"/>
+                </a:solidFill>
+                <a:latin typeface="Courier New"/>
+              </a:defRPr>
+            </a:pPr>
+            <a:r>
+              <a:rPr sz="1200" b="0">
+                <a:solidFill>
+                  <a:srgbClr val="F8FAFC"/>
+                </a:solidFill>
+                <a:latin typeface="Courier New"/>
+              </a:rPr>
+              <a:t>plt.figure(figsize=(7, 5))</a:t>
+            </a:r>
+          </a:p>
+          <a:p>
+            <a:pPr>
+              <a:defRPr sz="1200" b="0">
+                <a:solidFill>
+                  <a:srgbClr val="F8FAFC"/>
+                </a:solidFill>
+                <a:latin typeface="Courier New"/>
+              </a:defRPr>
+            </a:pPr>
+            <a:r>
+              <a:rPr sz="1200" b="0">
+                <a:solidFill>
+                  <a:srgbClr val="F8FAFC"/>
+                </a:solidFill>
+                <a:latin typeface="Courier New"/>
+              </a:rPr>
+              <a:t>plt.scatter(X[:, 0], X[:, 1], c=km.labels_, cmap="tab10", s=8, alpha=0.6)</a:t>
+            </a:r>
+          </a:p>
+          <a:p>
+            <a:pPr>
+              <a:defRPr sz="1200" b="0">
+                <a:solidFill>
+                  <a:srgbClr val="F8FAFC"/>
+                </a:solidFill>
+                <a:latin typeface="Courier New"/>
+              </a:defRPr>
+            </a:pPr>
+            <a:r>
+              <a:rPr sz="1200" b="0">
+                <a:solidFill>
+                  <a:srgbClr val="F8FAFC"/>
+                </a:solidFill>
+                <a:latin typeface="Courier New"/>
+              </a:rPr>
+              <a:t>plt.scatter(km.cluster_centers_[:, 0], km.cluster_centers_[:, 1],</a:t>
+            </a:r>
+          </a:p>
+          <a:p>
+            <a:pPr>
+              <a:defRPr sz="1200" b="0">
+                <a:solidFill>
+                  <a:srgbClr val="F8FAFC"/>
+                </a:solidFill>
+                <a:latin typeface="Courier New"/>
+              </a:defRPr>
+            </a:pPr>
+            <a:r>
+              <a:rPr sz="1200" b="0">
+                <a:solidFill>
+                  <a:srgbClr val="F8FAFC"/>
+                </a:solidFill>
+                <a:latin typeface="Courier New"/>
+              </a:rPr>
+              <a:t>            c="black", marker="X", s=150, label="centroides")</a:t>
+            </a:r>
+          </a:p>
+          <a:p>
+            <a:pPr>
+              <a:defRPr sz="1200" b="0">
+                <a:solidFill>
+                  <a:srgbClr val="F8FAFC"/>
+                </a:solidFill>
+                <a:latin typeface="Courier New"/>
+              </a:defRPr>
+            </a:pPr>
+            <a:r>
+              <a:rPr sz="1200" b="0">
+                <a:solidFill>
+                  <a:srgbClr val="F8FAFC"/>
+                </a:solidFill>
+                <a:latin typeface="Courier New"/>
+              </a:rPr>
+              <a:t>plt.legend(); plt.title("K-Means (K=5) sobre make_blobs")</a:t>
+            </a:r>
+          </a:p>
+          <a:p>
+            <a:pPr>
+              <a:defRPr sz="1200" b="0">
+                <a:solidFill>
+                  <a:srgbClr val="F8FAFC"/>
+                </a:solidFill>
+                <a:latin typeface="Courier New"/>
+              </a:defRPr>
+            </a:pPr>
+            <a:r>
+              <a:rPr sz="1200" b="0">
+                <a:solidFill>
+                  <a:srgbClr val="F8FAFC"/>
+                </a:solidFill>
+                <a:latin typeface="Courier New"/>
+              </a:rPr>
+              <a:t>plt.tight_layout(); plt.show()</a:t>
             </a:r>
           </a:p>
         </p:txBody>

--- a/classes/parte-1-machine-learning-clasico/095-clustering-k-means-seleccion-de-k-mini-batch/clase-095-clustering-k-means-seleccion-de-k-mini-batch-presentacion.pptx
+++ b/classes/parte-1-machine-learning-clasico/095-clustering-k-means-seleccion-de-k-mini-batch/clase-095-clustering-k-means-seleccion-de-k-mini-batch-presentacion.pptx
@@ -3272,7 +3272,7 @@
                 </a:solidFill>
                 <a:latin typeface="Segoe UI"/>
               </a:rPr>
-              <a:t>Parte: 1 — Machine Learning Clásico · Fuente: Géron, cap. 9.  Duración estimada: 70 min.</a:t>
+              <a:t>Parte: 1 — Machine Learning Clásico · Fuente: Géron, cap. 9.  Duración estimada: 70 min. · Nivel: Intermedio</a:t>
             </a:r>
           </a:p>
         </p:txBody>
@@ -3581,7 +3581,7 @@
                 </a:solidFill>
                 <a:latin typeface="Segoe UI"/>
               </a:rPr>
-              <a:t>Parte: 1 — Machine Learning Clásico · Fuente: Géron, cap. 9.  Duración estimada: 70 min.</a:t>
+              <a:t>Parte: 1 — Machine Learning Clásico · Fuente: Géron, cap. 9.  Duración estimada: 70 min. · Nivel: Intermedio</a:t>
             </a:r>
           </a:p>
         </p:txBody>
